--- a/.lessons/23 Fundamental Blade Components/1 Creating Blade Components/1.pptx
+++ b/.lessons/23 Fundamental Blade Components/1 Creating Blade Components/1.pptx
@@ -423,7 +423,7 @@
           <a:p>
             <a:fld id="{3E102D2E-813C-461C-9963-687A650C48C0}" type="datetimeFigureOut">
               <a:rPr lang="en-US" smtClean="0"/>
-              <a:t>5/24/2025</a:t>
+              <a:t>5/25/2025</a:t>
             </a:fld>
             <a:endParaRPr lang="en-US"/>
           </a:p>
@@ -621,7 +621,7 @@
           <a:p>
             <a:fld id="{3E102D2E-813C-461C-9963-687A650C48C0}" type="datetimeFigureOut">
               <a:rPr lang="en-US" smtClean="0"/>
-              <a:t>5/24/2025</a:t>
+              <a:t>5/25/2025</a:t>
             </a:fld>
             <a:endParaRPr lang="en-US"/>
           </a:p>
@@ -829,7 +829,7 @@
           <a:p>
             <a:fld id="{3E102D2E-813C-461C-9963-687A650C48C0}" type="datetimeFigureOut">
               <a:rPr lang="en-US" smtClean="0"/>
-              <a:t>5/24/2025</a:t>
+              <a:t>5/25/2025</a:t>
             </a:fld>
             <a:endParaRPr lang="en-US"/>
           </a:p>
@@ -1027,7 +1027,7 @@
           <a:p>
             <a:fld id="{3E102D2E-813C-461C-9963-687A650C48C0}" type="datetimeFigureOut">
               <a:rPr lang="en-US" smtClean="0"/>
-              <a:t>5/24/2025</a:t>
+              <a:t>5/25/2025</a:t>
             </a:fld>
             <a:endParaRPr lang="en-US"/>
           </a:p>
@@ -1302,7 +1302,7 @@
           <a:p>
             <a:fld id="{3E102D2E-813C-461C-9963-687A650C48C0}" type="datetimeFigureOut">
               <a:rPr lang="en-US" smtClean="0"/>
-              <a:t>5/24/2025</a:t>
+              <a:t>5/25/2025</a:t>
             </a:fld>
             <a:endParaRPr lang="en-US"/>
           </a:p>
@@ -1567,7 +1567,7 @@
           <a:p>
             <a:fld id="{3E102D2E-813C-461C-9963-687A650C48C0}" type="datetimeFigureOut">
               <a:rPr lang="en-US" smtClean="0"/>
-              <a:t>5/24/2025</a:t>
+              <a:t>5/25/2025</a:t>
             </a:fld>
             <a:endParaRPr lang="en-US"/>
           </a:p>
@@ -1979,7 +1979,7 @@
           <a:p>
             <a:fld id="{3E102D2E-813C-461C-9963-687A650C48C0}" type="datetimeFigureOut">
               <a:rPr lang="en-US" smtClean="0"/>
-              <a:t>5/24/2025</a:t>
+              <a:t>5/25/2025</a:t>
             </a:fld>
             <a:endParaRPr lang="en-US"/>
           </a:p>
@@ -2120,7 +2120,7 @@
           <a:p>
             <a:fld id="{3E102D2E-813C-461C-9963-687A650C48C0}" type="datetimeFigureOut">
               <a:rPr lang="en-US" smtClean="0"/>
-              <a:t>5/24/2025</a:t>
+              <a:t>5/25/2025</a:t>
             </a:fld>
             <a:endParaRPr lang="en-US"/>
           </a:p>
@@ -2233,7 +2233,7 @@
           <a:p>
             <a:fld id="{3E102D2E-813C-461C-9963-687A650C48C0}" type="datetimeFigureOut">
               <a:rPr lang="en-US" smtClean="0"/>
-              <a:t>5/24/2025</a:t>
+              <a:t>5/25/2025</a:t>
             </a:fld>
             <a:endParaRPr lang="en-US"/>
           </a:p>
@@ -2544,7 +2544,7 @@
           <a:p>
             <a:fld id="{3E102D2E-813C-461C-9963-687A650C48C0}" type="datetimeFigureOut">
               <a:rPr lang="en-US" smtClean="0"/>
-              <a:t>5/24/2025</a:t>
+              <a:t>5/25/2025</a:t>
             </a:fld>
             <a:endParaRPr lang="en-US"/>
           </a:p>
@@ -2832,7 +2832,7 @@
           <a:p>
             <a:fld id="{3E102D2E-813C-461C-9963-687A650C48C0}" type="datetimeFigureOut">
               <a:rPr lang="en-US" smtClean="0"/>
-              <a:t>5/24/2025</a:t>
+              <a:t>5/25/2025</a:t>
             </a:fld>
             <a:endParaRPr lang="en-US"/>
           </a:p>
@@ -3073,7 +3073,7 @@
           <a:p>
             <a:fld id="{3E102D2E-813C-461C-9963-687A650C48C0}" type="datetimeFigureOut">
               <a:rPr lang="en-US" smtClean="0"/>
-              <a:t>5/24/2025</a:t>
+              <a:t>5/25/2025</a:t>
             </a:fld>
             <a:endParaRPr lang="en-US"/>
           </a:p>
@@ -12811,7 +12811,7 @@
         <p:spPr>
           <a:xfrm>
             <a:off x="217714" y="255046"/>
-            <a:ext cx="11756571" cy="5456750"/>
+            <a:ext cx="11756571" cy="6356997"/>
           </a:xfrm>
           <a:prstGeom prst="rect">
             <a:avLst/>
@@ -12895,6 +12895,16 @@
               </a:rPr>
               <a:t> )</a:t>
             </a:r>
+            <a:endParaRPr kumimoji="0" lang="en-US" altLang="en-US" sz="1300" b="0" i="0" u="none" strike="noStrike" cap="none" normalizeH="0" baseline="0">
+              <a:ln>
+                <a:noFill/>
+              </a:ln>
+              <a:solidFill>
+                <a:schemeClr val="tx1"/>
+              </a:solidFill>
+              <a:effectLst/>
+              <a:latin typeface="Arial" panose="020B0604020202020204" pitchFamily="34" charset="0"/>
+            </a:endParaRPr>
           </a:p>
           <a:p>
             <a:pPr>
@@ -12981,17 +12991,6 @@
               </a:lnSpc>
               <a:buNone/>
             </a:pPr>
-            <a:endParaRPr lang="az-Latn-AZ" altLang="en-US" sz="1300">
-              <a:latin typeface="Arial" panose="020B0604020202020204" pitchFamily="34" charset="0"/>
-            </a:endParaRPr>
-          </a:p>
-          <a:p>
-            <a:pPr>
-              <a:lnSpc>
-                <a:spcPct val="150000"/>
-              </a:lnSpc>
-              <a:buNone/>
-            </a:pPr>
             <a:endParaRPr kumimoji="0" lang="az-Latn-AZ" altLang="en-US" sz="1300" b="0" i="0" u="none" strike="noStrike" cap="none" normalizeH="0" baseline="0">
               <a:ln>
                 <a:noFill/>
@@ -13160,7 +13159,115 @@
               </a:lnSpc>
               <a:buNone/>
             </a:pPr>
-            <a:endParaRPr kumimoji="0" lang="az-Latn-AZ" altLang="en-US" sz="1300" b="0" i="0" u="none" strike="noStrike" cap="none" normalizeH="0" baseline="0">
+            <a:endParaRPr lang="az-Latn-AZ" altLang="en-US" sz="1300">
+              <a:latin typeface="Arial" panose="020B0604020202020204" pitchFamily="34" charset="0"/>
+            </a:endParaRPr>
+          </a:p>
+          <a:p>
+            <a:pPr>
+              <a:lnSpc>
+                <a:spcPct val="150000"/>
+              </a:lnSpc>
+              <a:buNone/>
+            </a:pPr>
+            <a:r>
+              <a:rPr kumimoji="0" lang="az-Latn-AZ" altLang="en-US" sz="1300" b="1" i="0" u="none" strike="noStrike" cap="none" normalizeH="0" baseline="0">
+                <a:ln>
+                  <a:noFill/>
+                </a:ln>
+                <a:solidFill>
+                  <a:schemeClr val="tx1"/>
+                </a:solidFill>
+                <a:effectLst/>
+                <a:latin typeface="Arial" panose="020B0604020202020204" pitchFamily="34" charset="0"/>
+              </a:rPr>
+              <a:t>button</a:t>
+            </a:r>
+            <a:r>
+              <a:rPr kumimoji="0" lang="en-US" altLang="en-US" sz="1300" b="1" i="0" u="none" strike="noStrike" cap="none" normalizeH="0" baseline="0">
+                <a:ln>
+                  <a:noFill/>
+                </a:ln>
+                <a:solidFill>
+                  <a:schemeClr val="tx1"/>
+                </a:solidFill>
+                <a:effectLst/>
+                <a:latin typeface="Arial" panose="020B0604020202020204" pitchFamily="34" charset="0"/>
+              </a:rPr>
+              <a:t>.blade.php </a:t>
+            </a:r>
+            <a:r>
+              <a:rPr kumimoji="0" lang="az-Latn-AZ" altLang="en-US" sz="1300" b="0" i="0" u="none" strike="noStrike" cap="none" normalizeH="0" baseline="0">
+                <a:ln>
+                  <a:noFill/>
+                </a:ln>
+                <a:solidFill>
+                  <a:schemeClr val="tx1"/>
+                </a:solidFill>
+                <a:effectLst/>
+                <a:latin typeface="Arial" panose="020B0604020202020204" pitchFamily="34" charset="0"/>
+              </a:rPr>
+              <a:t>şablonu (</a:t>
+            </a:r>
+            <a:r>
+              <a:rPr kumimoji="0" lang="en-US" altLang="en-US" sz="1300" b="0" i="0" u="none" strike="noStrike" cap="none" normalizeH="0" baseline="0">
+                <a:ln>
+                  <a:noFill/>
+                </a:ln>
+                <a:solidFill>
+                  <a:schemeClr val="tx1"/>
+                </a:solidFill>
+                <a:effectLst/>
+                <a:latin typeface="Arial" panose="020B0604020202020204" pitchFamily="34" charset="0"/>
+              </a:rPr>
+              <a:t>view</a:t>
+            </a:r>
+            <a:r>
+              <a:rPr kumimoji="0" lang="az-Latn-AZ" altLang="en-US" sz="1300" b="0" i="0" u="none" strike="noStrike" cap="none" normalizeH="0" baseline="0">
+                <a:ln>
+                  <a:noFill/>
+                </a:ln>
+                <a:solidFill>
+                  <a:schemeClr val="tx1"/>
+                </a:solidFill>
+                <a:effectLst/>
+                <a:latin typeface="Arial" panose="020B0604020202020204" pitchFamily="34" charset="0"/>
+              </a:rPr>
+              <a:t>)</a:t>
+            </a:r>
+            <a:r>
+              <a:rPr kumimoji="0" lang="en-US" altLang="en-US" sz="1300" b="0" i="0" u="none" strike="noStrike" cap="none" normalizeH="0" baseline="0">
+                <a:ln>
+                  <a:noFill/>
+                </a:ln>
+                <a:solidFill>
+                  <a:schemeClr val="tx1"/>
+                </a:solidFill>
+                <a:effectLst/>
+                <a:latin typeface="Arial" panose="020B0604020202020204" pitchFamily="34" charset="0"/>
+              </a:rPr>
+              <a:t>:</a:t>
+            </a:r>
+          </a:p>
+          <a:p>
+            <a:pPr>
+              <a:lnSpc>
+                <a:spcPct val="150000"/>
+              </a:lnSpc>
+              <a:buNone/>
+            </a:pPr>
+            <a:endParaRPr lang="en-US" altLang="en-US" sz="1300">
+              <a:latin typeface="Arial" panose="020B0604020202020204" pitchFamily="34" charset="0"/>
+            </a:endParaRPr>
+          </a:p>
+          <a:p>
+            <a:pPr>
+              <a:lnSpc>
+                <a:spcPct val="150000"/>
+              </a:lnSpc>
+              <a:buNone/>
+            </a:pPr>
+            <a:endParaRPr kumimoji="0" lang="en-US" altLang="en-US" sz="1300" b="0" i="0" u="none" strike="noStrike" cap="none" normalizeH="0" baseline="0">
               <a:ln>
                 <a:noFill/>
               </a:ln>
@@ -13189,95 +13296,70 @@
               </a:lnSpc>
               <a:buNone/>
             </a:pPr>
-            <a:endParaRPr lang="az-Latn-AZ" altLang="en-US" sz="1300">
-              <a:latin typeface="Arial" panose="020B0604020202020204" pitchFamily="34" charset="0"/>
-            </a:endParaRPr>
-          </a:p>
-          <a:p>
-            <a:pPr>
-              <a:lnSpc>
-                <a:spcPct val="150000"/>
-              </a:lnSpc>
-              <a:buNone/>
-            </a:pPr>
-            <a:r>
-              <a:rPr kumimoji="0" lang="az-Latn-AZ" altLang="en-US" sz="1300" b="1" i="0" u="none" strike="noStrike" cap="none" normalizeH="0" baseline="0">
-                <a:ln>
-                  <a:noFill/>
-                </a:ln>
-                <a:solidFill>
-                  <a:schemeClr val="tx1"/>
-                </a:solidFill>
-                <a:effectLst/>
-                <a:latin typeface="Arial" panose="020B0604020202020204" pitchFamily="34" charset="0"/>
-              </a:rPr>
-              <a:t>button</a:t>
-            </a:r>
-            <a:r>
-              <a:rPr kumimoji="0" lang="en-US" altLang="en-US" sz="1300" b="1" i="0" u="none" strike="noStrike" cap="none" normalizeH="0" baseline="0">
-                <a:ln>
-                  <a:noFill/>
-                </a:ln>
-                <a:solidFill>
-                  <a:schemeClr val="tx1"/>
-                </a:solidFill>
-                <a:effectLst/>
-                <a:latin typeface="Arial" panose="020B0604020202020204" pitchFamily="34" charset="0"/>
-              </a:rPr>
-              <a:t>.blade.php </a:t>
-            </a:r>
-            <a:r>
-              <a:rPr kumimoji="0" lang="az-Latn-AZ" altLang="en-US" sz="1300" b="0" i="0" u="none" strike="noStrike" cap="none" normalizeH="0" baseline="0">
-                <a:ln>
-                  <a:noFill/>
-                </a:ln>
-                <a:solidFill>
-                  <a:schemeClr val="tx1"/>
-                </a:solidFill>
-                <a:effectLst/>
-                <a:latin typeface="Arial" panose="020B0604020202020204" pitchFamily="34" charset="0"/>
-              </a:rPr>
-              <a:t>şablonu (</a:t>
-            </a:r>
-            <a:r>
-              <a:rPr kumimoji="0" lang="en-US" altLang="en-US" sz="1300" b="0" i="0" u="none" strike="noStrike" cap="none" normalizeH="0" baseline="0">
-                <a:ln>
-                  <a:noFill/>
-                </a:ln>
-                <a:solidFill>
-                  <a:schemeClr val="tx1"/>
-                </a:solidFill>
-                <a:effectLst/>
-                <a:latin typeface="Arial" panose="020B0604020202020204" pitchFamily="34" charset="0"/>
-              </a:rPr>
-              <a:t>view</a:t>
-            </a:r>
-            <a:r>
-              <a:rPr kumimoji="0" lang="az-Latn-AZ" altLang="en-US" sz="1300" b="0" i="0" u="none" strike="noStrike" cap="none" normalizeH="0" baseline="0">
-                <a:ln>
-                  <a:noFill/>
-                </a:ln>
-                <a:solidFill>
-                  <a:schemeClr val="tx1"/>
-                </a:solidFill>
-                <a:effectLst/>
-                <a:latin typeface="Arial" panose="020B0604020202020204" pitchFamily="34" charset="0"/>
-              </a:rPr>
-              <a:t>)</a:t>
-            </a:r>
-            <a:r>
-              <a:rPr kumimoji="0" lang="en-US" altLang="en-US" sz="1300" b="0" i="0" u="none" strike="noStrike" cap="none" normalizeH="0" baseline="0">
-                <a:ln>
-                  <a:noFill/>
-                </a:ln>
-                <a:solidFill>
-                  <a:schemeClr val="tx1"/>
-                </a:solidFill>
-                <a:effectLst/>
-                <a:latin typeface="Arial" panose="020B0604020202020204" pitchFamily="34" charset="0"/>
-              </a:rPr>
-              <a:t>:</a:t>
-            </a:r>
+            <a:endParaRPr kumimoji="0" lang="en-US" altLang="en-US" sz="1300" b="0" i="0" u="none" strike="noStrike" cap="none" normalizeH="0" baseline="0">
+              <a:ln>
+                <a:noFill/>
+              </a:ln>
+              <a:solidFill>
+                <a:schemeClr val="tx1"/>
+              </a:solidFill>
+              <a:effectLst/>
+              <a:latin typeface="Arial" panose="020B0604020202020204" pitchFamily="34" charset="0"/>
+            </a:endParaRPr>
+          </a:p>
+          <a:p>
+            <a:pPr>
+              <a:lnSpc>
+                <a:spcPct val="150000"/>
+              </a:lnSpc>
+              <a:buNone/>
+            </a:pPr>
+            <a:r>
+              <a:rPr lang="en-US" altLang="en-US" sz="1300">
+                <a:latin typeface="Arial" panose="020B0604020202020204" pitchFamily="34" charset="0"/>
+              </a:rPr>
+              <a:t>Bu d</a:t>
+            </a:r>
+            <a:r>
+              <a:rPr lang="az-Latn-AZ" altLang="en-US" sz="1300">
+                <a:latin typeface="Arial" panose="020B0604020202020204" pitchFamily="34" charset="0"/>
+              </a:rPr>
+              <a:t>ərs haqqında 3cü qovluqda ətraflı qeyd edəcəm. Yuxarıda component içində sadəcə </a:t>
+            </a:r>
+            <a:r>
+              <a:rPr lang="az-Latn-AZ" altLang="en-US" sz="1300" b="1">
+                <a:latin typeface="Arial" panose="020B0604020202020204" pitchFamily="34" charset="0"/>
+              </a:rPr>
+              <a:t>type</a:t>
+            </a:r>
+            <a:r>
+              <a:rPr lang="az-Latn-AZ" altLang="en-US" sz="1300">
+                <a:latin typeface="Arial" panose="020B0604020202020204" pitchFamily="34" charset="0"/>
+              </a:rPr>
+              <a:t> yazmışıq ancaq biz birdən çox datanı (posts) obyekt kimi göndərəcəyik və belə yazacağıq:     :post = </a:t>
+            </a:r>
+            <a:r>
+              <a:rPr lang="en-US" altLang="en-US" sz="1300">
+                <a:latin typeface="Arial" panose="020B0604020202020204" pitchFamily="34" charset="0"/>
+              </a:rPr>
+              <a:t>“$post”   </a:t>
+            </a:r>
+            <a:r>
+              <a:rPr lang="az-Latn-AZ" altLang="en-US" sz="1300">
+                <a:latin typeface="Arial" panose="020B0604020202020204" pitchFamily="34" charset="0"/>
+              </a:rPr>
+              <a:t>     . Bu iki yazılış arasındakı fərqi sonra izah edəcəm.</a:t>
+            </a:r>
+            <a:endParaRPr kumimoji="0" lang="en-US" altLang="en-US" sz="1300" b="0" i="0" u="none" strike="noStrike" cap="none" normalizeH="0" baseline="0">
+              <a:ln>
+                <a:noFill/>
+              </a:ln>
+              <a:solidFill>
+                <a:schemeClr val="tx1"/>
+              </a:solidFill>
+              <a:effectLst/>
+              <a:latin typeface="Arial" panose="020B0604020202020204" pitchFamily="34" charset="0"/>
+            </a:endParaRPr>
           </a:p>
         </p:txBody>
       </p:sp>
@@ -13303,8 +13385,8 @@
         </p:blipFill>
         <p:spPr>
           <a:xfrm>
-            <a:off x="0" y="1253454"/>
-            <a:ext cx="4915586" cy="543001"/>
+            <a:off x="0" y="1225174"/>
+            <a:ext cx="4355184" cy="481096"/>
           </a:xfrm>
           <a:prstGeom prst="rect">
             <a:avLst/>
@@ -13333,8 +13415,8 @@
         </p:blipFill>
         <p:spPr>
           <a:xfrm>
-            <a:off x="0" y="2684446"/>
-            <a:ext cx="4429743" cy="2086266"/>
+            <a:off x="0" y="2414651"/>
+            <a:ext cx="3308808" cy="1558342"/>
           </a:xfrm>
           <a:prstGeom prst="rect">
             <a:avLst/>
@@ -13363,8 +13445,8 @@
         </p:blipFill>
         <p:spPr>
           <a:xfrm>
-            <a:off x="0" y="5711796"/>
-            <a:ext cx="3448531" cy="962159"/>
+            <a:off x="0" y="4811550"/>
+            <a:ext cx="2818614" cy="786409"/>
           </a:xfrm>
           <a:prstGeom prst="rect">
             <a:avLst/>
@@ -14961,8 +15043,8 @@
               <a:chExt cx="506160" cy="3641400"/>
             </a:xfrm>
           </p:grpSpPr>
-          <mc:AlternateContent xmlns:mc="http://schemas.openxmlformats.org/markup-compatibility/2006">
-            <mc:Choice xmlns:p14="http://schemas.microsoft.com/office/powerpoint/2010/main" Requires="p14">
+          <mc:AlternateContent xmlns:mc="http://schemas.openxmlformats.org/markup-compatibility/2006" xmlns:p14="http://schemas.microsoft.com/office/powerpoint/2010/main">
+            <mc:Choice Requires="p14">
               <p:contentPart p14:bwMode="auto" r:id="rId4">
                 <p14:nvContentPartPr>
                   <p14:cNvPr id="2" name="Ink 1">
@@ -14981,7 +15063,7 @@
                 </p14:xfrm>
               </p:contentPart>
             </mc:Choice>
-            <mc:Fallback>
+            <mc:Fallback xmlns="">
               <p:pic>
                 <p:nvPicPr>
                   <p:cNvPr id="2" name="Ink 1">
@@ -15012,8 +15094,8 @@
               </p:pic>
             </mc:Fallback>
           </mc:AlternateContent>
-          <mc:AlternateContent xmlns:mc="http://schemas.openxmlformats.org/markup-compatibility/2006">
-            <mc:Choice xmlns:p14="http://schemas.microsoft.com/office/powerpoint/2010/main" Requires="p14">
+          <mc:AlternateContent xmlns:mc="http://schemas.openxmlformats.org/markup-compatibility/2006" xmlns:p14="http://schemas.microsoft.com/office/powerpoint/2010/main">
+            <mc:Choice Requires="p14">
               <p:contentPart p14:bwMode="auto" r:id="rId6">
                 <p14:nvContentPartPr>
                   <p14:cNvPr id="4" name="Ink 3">
@@ -15032,7 +15114,7 @@
                 </p14:xfrm>
               </p:contentPart>
             </mc:Choice>
-            <mc:Fallback>
+            <mc:Fallback xmlns="">
               <p:pic>
                 <p:nvPicPr>
                   <p:cNvPr id="4" name="Ink 3">
@@ -15084,8 +15166,8 @@
               <a:chExt cx="7587720" cy="4082400"/>
             </a:xfrm>
           </p:grpSpPr>
-          <mc:AlternateContent xmlns:mc="http://schemas.openxmlformats.org/markup-compatibility/2006">
-            <mc:Choice xmlns:p14="http://schemas.microsoft.com/office/powerpoint/2010/main" Requires="p14">
+          <mc:AlternateContent xmlns:mc="http://schemas.openxmlformats.org/markup-compatibility/2006" xmlns:p14="http://schemas.microsoft.com/office/powerpoint/2010/main">
+            <mc:Choice Requires="p14">
               <p:contentPart p14:bwMode="auto" r:id="rId8">
                 <p14:nvContentPartPr>
                   <p14:cNvPr id="9" name="Ink 8">
@@ -15104,7 +15186,7 @@
                 </p14:xfrm>
               </p:contentPart>
             </mc:Choice>
-            <mc:Fallback>
+            <mc:Fallback xmlns="">
               <p:pic>
                 <p:nvPicPr>
                   <p:cNvPr id="9" name="Ink 8">
@@ -15135,8 +15217,8 @@
               </p:pic>
             </mc:Fallback>
           </mc:AlternateContent>
-          <mc:AlternateContent xmlns:mc="http://schemas.openxmlformats.org/markup-compatibility/2006">
-            <mc:Choice xmlns:p14="http://schemas.microsoft.com/office/powerpoint/2010/main" Requires="p14">
+          <mc:AlternateContent xmlns:mc="http://schemas.openxmlformats.org/markup-compatibility/2006" xmlns:p14="http://schemas.microsoft.com/office/powerpoint/2010/main">
+            <mc:Choice Requires="p14">
               <p:contentPart p14:bwMode="auto" r:id="rId10">
                 <p14:nvContentPartPr>
                   <p14:cNvPr id="10" name="Ink 9">
@@ -15155,7 +15237,7 @@
                 </p14:xfrm>
               </p:contentPart>
             </mc:Choice>
-            <mc:Fallback>
+            <mc:Fallback xmlns="">
               <p:pic>
                 <p:nvPicPr>
                   <p:cNvPr id="10" name="Ink 9">
@@ -15186,8 +15268,8 @@
               </p:pic>
             </mc:Fallback>
           </mc:AlternateContent>
-          <mc:AlternateContent xmlns:mc="http://schemas.openxmlformats.org/markup-compatibility/2006">
-            <mc:Choice xmlns:p14="http://schemas.microsoft.com/office/powerpoint/2010/main" Requires="p14">
+          <mc:AlternateContent xmlns:mc="http://schemas.openxmlformats.org/markup-compatibility/2006" xmlns:p14="http://schemas.microsoft.com/office/powerpoint/2010/main">
+            <mc:Choice Requires="p14">
               <p:contentPart p14:bwMode="auto" r:id="rId12">
                 <p14:nvContentPartPr>
                   <p14:cNvPr id="12" name="Ink 11">
@@ -15206,7 +15288,7 @@
                 </p14:xfrm>
               </p:contentPart>
             </mc:Choice>
-            <mc:Fallback>
+            <mc:Fallback xmlns="">
               <p:pic>
                 <p:nvPicPr>
                   <p:cNvPr id="12" name="Ink 11">
